--- a/docs/ГуберКН - защита проекта.pptx
+++ b/docs/ГуберКН - защита проекта.pptx
@@ -12024,7 +12024,7 @@
           <p:nvPr>
             <p:extLst>
               <p:ext uri="{D42A27DB-BD31-4B8C-83A1-F6EECF244321}">
-                <p14:modId xmlns:p14="http://schemas.microsoft.com/office/powerpoint/2010/main" val="4026457982"/>
+                <p14:modId xmlns:p14="http://schemas.microsoft.com/office/powerpoint/2010/main" val="4106739363"/>
               </p:ext>
             </p:extLst>
           </p:nvPr>
@@ -12803,7 +12803,19 @@
                           <a:cs typeface="Roboto"/>
                           <a:sym typeface="Roboto"/>
                         </a:rPr>
-                        <a:t>Получен опыт взаимодействия с ИИ-агентов</a:t>
+                        <a:t>Получен опыт взаимодействия </a:t>
+                      </a:r>
+                      <a:r>
+                        <a:rPr lang="ru-RU">
+                          <a:solidFill>
+                            <a:schemeClr val="dk1"/>
+                          </a:solidFill>
+                          <a:latin typeface="Roboto"/>
+                          <a:ea typeface="Roboto"/>
+                          <a:cs typeface="Roboto"/>
+                          <a:sym typeface="Roboto"/>
+                        </a:rPr>
+                        <a:t>с ИИ-агентом</a:t>
                       </a:r>
                       <a:endParaRPr dirty="0">
                         <a:solidFill>

--- a/docs/ГуберКН - защита проекта.pptx
+++ b/docs/ГуберКН - защита проекта.pptx
@@ -11601,10 +11601,10 @@
       </p:sp>
       <p:pic>
         <p:nvPicPr>
-          <p:cNvPr id="3" name="Рисунок 2">
+          <p:cNvPr id="4" name="Рисунок 3">
             <a:extLst>
               <a:ext uri="{FF2B5EF4-FFF2-40B4-BE49-F238E27FC236}">
-                <a16:creationId xmlns:a16="http://schemas.microsoft.com/office/drawing/2014/main" id="{763C1971-184F-9A69-CF8D-8E0FE05DDF00}"/>
+                <a16:creationId xmlns:a16="http://schemas.microsoft.com/office/drawing/2014/main" id="{91A741DB-72BB-DDC2-1888-1A4BFE957F9F}"/>
               </a:ext>
             </a:extLst>
           </p:cNvPr>
@@ -11621,8 +11621,8 @@
         </p:blipFill>
         <p:spPr>
           <a:xfrm>
-            <a:off x="962526" y="855017"/>
-            <a:ext cx="6400770" cy="4065898"/>
+            <a:off x="1271692" y="894368"/>
+            <a:ext cx="6978316" cy="3918408"/>
           </a:xfrm>
           <a:prstGeom prst="rect">
             <a:avLst/>
@@ -11853,10 +11853,10 @@
       </p:sp>
       <p:pic>
         <p:nvPicPr>
-          <p:cNvPr id="3" name="Рисунок 2">
+          <p:cNvPr id="4" name="Рисунок 3">
             <a:extLst>
               <a:ext uri="{FF2B5EF4-FFF2-40B4-BE49-F238E27FC236}">
-                <a16:creationId xmlns:a16="http://schemas.microsoft.com/office/drawing/2014/main" id="{B51FDC1B-4F7B-B9E4-32B4-86839DEF2047}"/>
+                <a16:creationId xmlns:a16="http://schemas.microsoft.com/office/drawing/2014/main" id="{6C3615CC-A20E-CFA3-B83C-40DED67D3BF5}"/>
               </a:ext>
             </a:extLst>
           </p:cNvPr>
@@ -11873,8 +11873,8 @@
         </p:blipFill>
         <p:spPr>
           <a:xfrm>
-            <a:off x="1106905" y="3017584"/>
-            <a:ext cx="6611353" cy="1940676"/>
+            <a:off x="1152160" y="3114014"/>
+            <a:ext cx="6217182" cy="1551602"/>
           </a:xfrm>
           <a:prstGeom prst="rect">
             <a:avLst/>
@@ -11883,10 +11883,10 @@
       </p:pic>
       <p:pic>
         <p:nvPicPr>
-          <p:cNvPr id="5" name="Рисунок 4">
+          <p:cNvPr id="9" name="Рисунок 8">
             <a:extLst>
               <a:ext uri="{FF2B5EF4-FFF2-40B4-BE49-F238E27FC236}">
-                <a16:creationId xmlns:a16="http://schemas.microsoft.com/office/drawing/2014/main" id="{C39AFE31-7484-02C7-08B8-E979693DC985}"/>
+                <a16:creationId xmlns:a16="http://schemas.microsoft.com/office/drawing/2014/main" id="{2613E382-8916-4AD4-77C6-24A8AE48AAA3}"/>
               </a:ext>
             </a:extLst>
           </p:cNvPr>
@@ -11903,8 +11903,8 @@
         </p:blipFill>
         <p:spPr>
           <a:xfrm>
-            <a:off x="1152160" y="855572"/>
-            <a:ext cx="6481878" cy="2068421"/>
+            <a:off x="1888958" y="752395"/>
+            <a:ext cx="4199021" cy="2377980"/>
           </a:xfrm>
           <a:prstGeom prst="rect">
             <a:avLst/>
@@ -16522,10 +16522,10 @@
       </p:sp>
       <p:pic>
         <p:nvPicPr>
-          <p:cNvPr id="4" name="Рисунок 3">
+          <p:cNvPr id="3" name="Рисунок 2">
             <a:extLst>
               <a:ext uri="{FF2B5EF4-FFF2-40B4-BE49-F238E27FC236}">
-                <a16:creationId xmlns:a16="http://schemas.microsoft.com/office/drawing/2014/main" id="{58CFCFD5-02D6-0689-26FA-F7306004DAF0}"/>
+                <a16:creationId xmlns:a16="http://schemas.microsoft.com/office/drawing/2014/main" id="{967E5EFA-DC25-468F-1F80-85733FBD8F38}"/>
               </a:ext>
             </a:extLst>
           </p:cNvPr>
@@ -16542,8 +16542,8 @@
         </p:blipFill>
         <p:spPr>
           <a:xfrm>
-            <a:off x="332108" y="1004637"/>
-            <a:ext cx="8643450" cy="3484476"/>
+            <a:off x="304271" y="931060"/>
+            <a:ext cx="8716879" cy="3551660"/>
           </a:xfrm>
           <a:prstGeom prst="rect">
             <a:avLst/>

--- a/docs/ГуберКН - защита проекта.pptx
+++ b/docs/ГуберКН - защита проекта.pptx
@@ -11621,7 +11621,7 @@
         </p:blipFill>
         <p:spPr>
           <a:xfrm>
-            <a:off x="1271692" y="894368"/>
+            <a:off x="1006998" y="894368"/>
             <a:ext cx="6978316" cy="3918408"/>
           </a:xfrm>
           <a:prstGeom prst="rect">

--- a/docs/ГуберКН - защита проекта.pptx
+++ b/docs/ГуберКН - защита проекта.pptx
@@ -11873,8 +11873,8 @@
         </p:blipFill>
         <p:spPr>
           <a:xfrm>
-            <a:off x="1152160" y="3114014"/>
-            <a:ext cx="6217182" cy="1551602"/>
+            <a:off x="1152160" y="3162990"/>
+            <a:ext cx="6020937" cy="1502626"/>
           </a:xfrm>
           <a:prstGeom prst="rect">
             <a:avLst/>
@@ -11903,7 +11903,7 @@
         </p:blipFill>
         <p:spPr>
           <a:xfrm>
-            <a:off x="1888958" y="752395"/>
+            <a:off x="1833353" y="791520"/>
             <a:ext cx="4199021" cy="2377980"/>
           </a:xfrm>
           <a:prstGeom prst="rect">
